--- a/docs/activities/Unit-08-Hypothesis.pptx
+++ b/docs/activities/Unit-08-Hypothesis.pptx
@@ -3674,7 +3674,7 @@
             </a:r>
             <a:r>
               <a:rPr/>
-              <a:t> will be posted soon.</a:t>
+              <a:t> are available in Practice Problems tab of the course website.</a:t>
             </a:r>
           </a:p>
           <a:p>
